--- a/lectures/week03-reproducible-notebooks/W03L_slides.pptx
+++ b/lectures/week03-reproducible-notebooks/W03L_slides.pptx
@@ -7,6 +7,7 @@
   <p:sldIdLst>
     <p:sldId id="256" r:id="rId2"/>
     <p:sldId id="257" r:id="rId3"/>
+    <p:sldId id="268" r:id="rId19"/>
     <p:sldId id="258" r:id="rId4"/>
     <p:sldId id="259" r:id="rId5"/>
     <p:sldId id="260" r:id="rId6"/>
@@ -624,7 +625,7 @@
           <a:p>
             <a:fld id="{F7021451-1387-4CA6-816F-3879F97B5CBC}" type="slidenum">
               <a:rPr lang="en-US"/>
-              <a:t>10</a:t>
+              <a:t>11</a:t>
             </a:fld>
             <a:endParaRPr lang="en-US"/>
           </a:p>
@@ -712,7 +713,7 @@
           <a:p>
             <a:fld id="{F7021451-1387-4CA6-816F-3879F97B5CBC}" type="slidenum">
               <a:rPr lang="en-US"/>
-              <a:t>11</a:t>
+              <a:t>12</a:t>
             </a:fld>
             <a:endParaRPr lang="en-US"/>
           </a:p>
@@ -819,6 +820,94 @@
 </p:notes>
 </file>
 
+<file path=ppt/notesSlides/notesSlide13.xml><?xml version="1.0" encoding="utf-8"?>
+<p:notes xmlns:a="http://schemas.openxmlformats.org/drawingml/2006/main" xmlns:r="http://schemas.openxmlformats.org/officeDocument/2006/relationships" xmlns:p="http://schemas.openxmlformats.org/presentationml/2006/main">
+  <p:cSld>
+    <p:spTree>
+      <p:nvGrpSpPr>
+        <p:cNvPr id="1" name=""/>
+        <p:cNvGrpSpPr/>
+        <p:nvPr/>
+      </p:nvGrpSpPr>
+      <p:grpSpPr>
+        <a:xfrm>
+          <a:off x="0" y="0"/>
+          <a:ext cx="0" cy="0"/>
+          <a:chOff x="0" y="0"/>
+          <a:chExt cx="0" cy="0"/>
+        </a:xfrm>
+      </p:grpSpPr>
+      <p:sp>
+        <p:nvSpPr>
+          <p:cNvPr id="2" name="Slide Image Placeholder 1"/>
+          <p:cNvSpPr>
+            <a:spLocks noGrp="1" noRot="1" noChangeAspect="1"/>
+          </p:cNvSpPr>
+          <p:nvPr>
+            <p:ph type="sldImg"/>
+          </p:nvPr>
+        </p:nvSpPr>
+        <p:spPr/>
+      </p:sp>
+      <p:sp>
+        <p:nvSpPr>
+          <p:cNvPr id="3" name="Notes Placeholder 2"/>
+          <p:cNvSpPr>
+            <a:spLocks noGrp="1"/>
+          </p:cNvSpPr>
+          <p:nvPr>
+            <p:ph type="body" idx="1"/>
+          </p:nvPr>
+        </p:nvSpPr>
+        <p:spPr/>
+        <p:txBody>
+          <a:bodyPr/>
+          <a:lstStyle/>
+          <a:p>
+            <a:r>
+              <a:rPr lang="en-US" dirty="0"/>
+              <a:t>Ask the three questions as literal show-of-hands, in order (each is a subset of the last). Roughly count/estimate hands for card 2 vs card 3 -- that gap is who got rescued by something other than AI. Then ask verbally (not on the slide): "for the AI-rescued hands, was that mostly you asking it to explain the error, or did it actually run/fix something for you?" -- chat vs. agentic use. Jot down a rough read of all of this; it is the input for Wednesday's Week 4 planning call, not a demo of its own.</a:t>
+            </a:r>
+            <a:endParaRPr lang="en-US" dirty="0"/>
+          </a:p>
+        </p:txBody>
+      </p:sp>
+      <p:sp>
+        <p:nvSpPr>
+          <p:cNvPr id="4" name="Slide Number Placeholder 3"/>
+          <p:cNvSpPr>
+            <a:spLocks noGrp="1"/>
+          </p:cNvSpPr>
+          <p:nvPr>
+            <p:ph type="sldNum" sz="quarter" idx="10"/>
+          </p:nvPr>
+        </p:nvSpPr>
+        <p:spPr/>
+        <p:txBody>
+          <a:bodyPr/>
+          <a:lstStyle/>
+          <a:p>
+            <a:fld id="{F7021451-1387-4CA6-816F-3879F97B5CBD}" type="slidenum">
+              <a:rPr lang="en-US"/>
+              <a:t>3</a:t>
+            </a:fld>
+            <a:endParaRPr lang="en-US"/>
+          </a:p>
+        </p:txBody>
+      </p:sp>
+    </p:spTree>
+    <p:extLst>
+      <p:ext uri="{BB962C8B-B14F-4D97-AF65-F5344CB8AC3E}">
+        <p14:creationId xmlns:p14="http://schemas.microsoft.com/office/powerpoint/2010/main" val="1024086992"/>
+      </p:ext>
+    </p:extLst>
+  </p:cSld>
+  <p:clrMapOvr>
+    <a:masterClrMapping/>
+  </p:clrMapOvr>
+</p:notes>
+</file>
+
 <file path=ppt/notesSlides/notesSlide2.xml><?xml version="1.0" encoding="utf-8"?>
 <p:notes xmlns:a="http://schemas.openxmlformats.org/drawingml/2006/main" xmlns:r="http://schemas.openxmlformats.org/officeDocument/2006/relationships" xmlns:p="http://schemas.openxmlformats.org/presentationml/2006/main">
   <p:cSld>
@@ -976,7 +1065,7 @@
           <a:p>
             <a:fld id="{F7021451-1387-4CA6-816F-3879F97B5CBC}" type="slidenum">
               <a:rPr lang="en-US"/>
-              <a:t>3</a:t>
+              <a:t>4</a:t>
             </a:fld>
             <a:endParaRPr lang="en-US"/>
           </a:p>
@@ -1064,7 +1153,7 @@
           <a:p>
             <a:fld id="{F7021451-1387-4CA6-816F-3879F97B5CBC}" type="slidenum">
               <a:rPr lang="en-US"/>
-              <a:t>4</a:t>
+              <a:t>5</a:t>
             </a:fld>
             <a:endParaRPr lang="en-US"/>
           </a:p>
@@ -1152,7 +1241,7 @@
           <a:p>
             <a:fld id="{F7021451-1387-4CA6-816F-3879F97B5CBC}" type="slidenum">
               <a:rPr lang="en-US"/>
-              <a:t>5</a:t>
+              <a:t>6</a:t>
             </a:fld>
             <a:endParaRPr lang="en-US"/>
           </a:p>
@@ -1240,7 +1329,7 @@
           <a:p>
             <a:fld id="{F7021451-1387-4CA6-816F-3879F97B5CBC}" type="slidenum">
               <a:rPr lang="en-US"/>
-              <a:t>6</a:t>
+              <a:t>7</a:t>
             </a:fld>
             <a:endParaRPr lang="en-US"/>
           </a:p>
@@ -1416,7 +1505,7 @@
           <a:p>
             <a:fld id="{F7021451-1387-4CA6-816F-3879F97B5CBC}" type="slidenum">
               <a:rPr lang="en-US"/>
-              <a:t>8</a:t>
+              <a:t>9</a:t>
             </a:fld>
             <a:endParaRPr lang="en-US"/>
           </a:p>
@@ -1504,7 +1593,7 @@
           <a:p>
             <a:fld id="{F7021451-1387-4CA6-816F-3879F97B5CBC}" type="slidenum">
               <a:rPr lang="en-US"/>
-              <a:t>9</a:t>
+              <a:t>10</a:t>
             </a:fld>
             <a:endParaRPr lang="en-US"/>
           </a:p>
@@ -3010,7 +3099,7 @@
                 <a:ea typeface="Calibri" pitchFamily="34" charset="-122"/>
                 <a:cs typeface="Calibri" pitchFamily="34" charset="-120"/>
               </a:rPr>
-              <a:t>10</a:t>
+              <a:t>11</a:t>
             </a:r>
             <a:endParaRPr lang="en-US" sz="1000" dirty="0"/>
           </a:p>
@@ -3737,7 +3826,7 @@
                 <a:ea typeface="Calibri" pitchFamily="34" charset="-122"/>
                 <a:cs typeface="Calibri" pitchFamily="34" charset="-120"/>
               </a:rPr>
-              <a:t>11</a:t>
+              <a:t>12</a:t>
             </a:r>
             <a:endParaRPr lang="en-US" sz="1000" dirty="0"/>
           </a:p>
@@ -4202,6 +4291,671 @@
 </p:sld>
 </file>
 
+<file path=ppt/slides/slide13.xml><?xml version="1.0" encoding="utf-8"?>
+<p:sld xmlns:a="http://schemas.openxmlformats.org/drawingml/2006/main" xmlns:r="http://schemas.openxmlformats.org/officeDocument/2006/relationships" xmlns:p="http://schemas.openxmlformats.org/presentationml/2006/main">
+  <p:cSld name="Slide 2b - Check-in">
+    <p:bg>
+      <p:bgPr>
+        <a:solidFill>
+          <a:srgbClr val="F4F7F9"/>
+        </a:solidFill>
+      </p:bgPr>
+    </p:bg>
+    <p:spTree>
+      <p:nvGrpSpPr>
+        <p:cNvPr id="1" name=""/>
+        <p:cNvGrpSpPr/>
+        <p:nvPr/>
+      </p:nvGrpSpPr>
+      <p:grpSpPr>
+        <a:xfrm>
+          <a:off x="0" y="0"/>
+          <a:ext cx="0" cy="0"/>
+          <a:chOff x="0" y="0"/>
+          <a:chExt cx="0" cy="0"/>
+        </a:xfrm>
+      </p:grpSpPr>
+      <p:sp>
+        <p:nvSpPr>
+          <p:cNvPr id="2" name="Text 0"/>
+          <p:cNvSpPr txBox="1"/>
+          <p:nvPr/>
+        </p:nvSpPr>
+        <p:spPr>
+          <a:xfrm>
+            <a:off x="548640" y="411480"/>
+            <a:ext cx="9144000" cy="365760"/>
+          </a:xfrm>
+          <a:prstGeom prst="rect">
+            <a:avLst/>
+          </a:prstGeom>
+          <a:noFill/>
+          <a:ln/>
+        </p:spPr>
+        <p:txBody>
+          <a:bodyPr wrap="square" lIns="0" tIns="0" rIns="0" bIns="0" rtlCol="0" anchor="ctr"/>
+          <a:lstStyle/>
+          <a:p>
+            <a:pPr indent="0" marL="0">
+              <a:buNone/>
+            </a:pPr>
+            <a:r>
+              <a:rPr lang="en-US" sz="1300" b="1" spc="200" kern="0" dirty="0">
+                <a:solidFill>
+                  <a:srgbClr val="1C7293"/>
+                </a:solidFill>
+                <a:latin typeface="Calibri" pitchFamily="34" charset="0"/>
+                <a:ea typeface="Calibri" pitchFamily="34" charset="-122"/>
+                <a:cs typeface="Calibri" pitchFamily="34" charset="-120"/>
+              </a:rPr>
+              <a:t>QUICK CHECK-IN</a:t>
+            </a:r>
+            <a:endParaRPr lang="en-US" sz="1300" dirty="0"/>
+          </a:p>
+        </p:txBody>
+      </p:sp>
+      <p:sp>
+        <p:nvSpPr>
+          <p:cNvPr id="3" name="Text 1"/>
+          <p:cNvSpPr txBox="1"/>
+          <p:nvPr/>
+        </p:nvSpPr>
+        <p:spPr>
+          <a:xfrm>
+            <a:off x="548640" y="749808"/>
+            <a:ext cx="10607040" cy="822960"/>
+          </a:xfrm>
+          <a:prstGeom prst="rect">
+            <a:avLst/>
+          </a:prstGeom>
+          <a:noFill/>
+          <a:ln/>
+        </p:spPr>
+        <p:txBody>
+          <a:bodyPr wrap="square" lIns="0" tIns="0" rIns="0" bIns="0" rtlCol="0" anchor="ctr"/>
+          <a:lstStyle/>
+          <a:p>
+            <a:pPr indent="0" marL="0">
+              <a:buNone/>
+            </a:pPr>
+            <a:r>
+              <a:rPr lang="en-US" sz="3200" b="1" dirty="0">
+                <a:solidFill>
+                  <a:srgbClr val="0B3D59"/>
+                </a:solidFill>
+                <a:latin typeface="Cambria" pitchFamily="34" charset="0"/>
+                <a:ea typeface="Cambria" pitchFamily="34" charset="-122"/>
+                <a:cs typeface="Cambria" pitchFamily="34" charset="-120"/>
+              </a:rPr>
+              <a:t>Show of hands: how'd Lab 1 go?</a:t>
+            </a:r>
+            <a:endParaRPr lang="en-US" sz="3200" dirty="0"/>
+          </a:p>
+        </p:txBody>
+      </p:sp>
+      <p:sp>
+        <p:nvSpPr>
+          <p:cNvPr id="4" name="Text 2"/>
+          <p:cNvSpPr txBox="1"/>
+          <p:nvPr/>
+        </p:nvSpPr>
+        <p:spPr>
+          <a:xfrm>
+            <a:off x="548640" y="1554480"/>
+            <a:ext cx="10607040" cy="457200"/>
+          </a:xfrm>
+          <a:prstGeom prst="rect">
+            <a:avLst/>
+          </a:prstGeom>
+          <a:noFill/>
+          <a:ln/>
+        </p:spPr>
+        <p:txBody>
+          <a:bodyPr wrap="square" lIns="0" tIns="0" rIns="0" bIns="0" rtlCol="0" anchor="ctr"/>
+          <a:lstStyle/>
+          <a:p>
+            <a:pPr indent="0" marL="0">
+              <a:buNone/>
+            </a:pPr>
+            <a:r>
+              <a:rPr lang="en-US" sz="1500" dirty="0">
+                <a:solidFill>
+                  <a:srgbClr val="5A6B75"/>
+                </a:solidFill>
+                <a:latin typeface="Calibri" pitchFamily="34" charset="0"/>
+                <a:ea typeface="Calibri" pitchFamily="34" charset="-122"/>
+                <a:cs typeface="Calibri" pitchFamily="34" charset="-120"/>
+              </a:rPr>
+              <a:t>Not graded, two minutes — this tells us how much AI-troubleshooting content Week 4 actually needs.</a:t>
+            </a:r>
+            <a:endParaRPr lang="en-US" sz="1500" dirty="0"/>
+          </a:p>
+        </p:txBody>
+      </p:sp>
+      <p:sp>
+        <p:nvSpPr>
+          <p:cNvPr id="5" name="Shape 3"/>
+          <p:cNvSpPr/>
+          <p:nvPr/>
+        </p:nvSpPr>
+        <p:spPr>
+          <a:xfrm>
+            <a:off x="548640" y="2286000"/>
+            <a:ext cx="3520440" cy="3291840"/>
+          </a:xfrm>
+          <a:prstGeom prst="roundRect">
+            <a:avLst>
+              <a:gd name="adj" fmla="val 3333"/>
+            </a:avLst>
+          </a:prstGeom>
+          <a:solidFill>
+            <a:srgbClr val="E3E9EC"/>
+          </a:solidFill>
+          <a:ln/>
+        </p:spPr>
+      </p:sp>
+      <p:sp>
+        <p:nvSpPr>
+          <p:cNvPr id="6" name="Shape 4"/>
+          <p:cNvSpPr/>
+          <p:nvPr/>
+        </p:nvSpPr>
+        <p:spPr>
+          <a:xfrm>
+            <a:off x="822960" y="2560320"/>
+            <a:ext cx="548640" cy="548640"/>
+          </a:xfrm>
+          <a:prstGeom prst="ellipse">
+            <a:avLst/>
+          </a:prstGeom>
+          <a:solidFill>
+            <a:srgbClr val="0B3D59"/>
+          </a:solidFill>
+          <a:ln/>
+        </p:spPr>
+      </p:sp>
+      <p:sp>
+        <p:nvSpPr>
+          <p:cNvPr id="7" name="Text 5"/>
+          <p:cNvSpPr txBox="1"/>
+          <p:nvPr/>
+        </p:nvSpPr>
+        <p:spPr>
+          <a:xfrm>
+            <a:off x="822960" y="2560320"/>
+            <a:ext cx="548640" cy="548640"/>
+          </a:xfrm>
+          <a:prstGeom prst="rect">
+            <a:avLst/>
+          </a:prstGeom>
+          <a:noFill/>
+          <a:ln/>
+        </p:spPr>
+        <p:txBody>
+          <a:bodyPr wrap="square" lIns="0" tIns="0" rIns="0" bIns="0" rtlCol="0" anchor="ctr"/>
+          <a:lstStyle/>
+          <a:p>
+            <a:pPr algn="ctr" indent="0" marL="0">
+              <a:buNone/>
+            </a:pPr>
+            <a:r>
+              <a:rPr lang="en-US" sz="2000" b="1" dirty="0">
+                <a:solidFill>
+                  <a:srgbClr val="FFFFFF"/>
+                </a:solidFill>
+                <a:latin typeface="Calibri" pitchFamily="34" charset="0"/>
+                <a:ea typeface="Calibri" pitchFamily="34" charset="-122"/>
+                <a:cs typeface="Calibri" pitchFamily="34" charset="-120"/>
+              </a:rPr>
+              <a:t>1</a:t>
+            </a:r>
+            <a:endParaRPr lang="en-US" sz="2000" dirty="0"/>
+          </a:p>
+        </p:txBody>
+      </p:sp>
+      <p:sp>
+        <p:nvSpPr>
+          <p:cNvPr id="8" name="Text 6"/>
+          <p:cNvSpPr txBox="1"/>
+          <p:nvPr/>
+        </p:nvSpPr>
+        <p:spPr>
+          <a:xfrm>
+            <a:off x="822960" y="3246120"/>
+            <a:ext cx="2971800" cy="457200"/>
+          </a:xfrm>
+          <a:prstGeom prst="rect">
+            <a:avLst/>
+          </a:prstGeom>
+          <a:noFill/>
+          <a:ln/>
+        </p:spPr>
+        <p:txBody>
+          <a:bodyPr wrap="square" lIns="0" tIns="0" rIns="0" bIns="0" rtlCol="0" anchor="ctr"/>
+          <a:lstStyle/>
+          <a:p>
+            <a:pPr indent="0" marL="0">
+              <a:buNone/>
+            </a:pPr>
+            <a:r>
+              <a:rPr lang="en-US" sz="1800" b="1" dirty="0">
+                <a:solidFill>
+                  <a:srgbClr val="0B3D59"/>
+                </a:solidFill>
+                <a:latin typeface="Cambria" pitchFamily="34" charset="0"/>
+                <a:ea typeface="Cambria" pitchFamily="34" charset="-122"/>
+                <a:cs typeface="Cambria" pitchFamily="34" charset="-120"/>
+              </a:rPr>
+              <a:t>Smooth sailing</a:t>
+            </a:r>
+            <a:endParaRPr lang="en-US" sz="1800" dirty="0"/>
+          </a:p>
+        </p:txBody>
+      </p:sp>
+      <p:sp>
+        <p:nvSpPr>
+          <p:cNvPr id="9" name="Text 7"/>
+          <p:cNvSpPr txBox="1"/>
+          <p:nvPr/>
+        </p:nvSpPr>
+        <p:spPr>
+          <a:xfrm>
+            <a:off x="822960" y="3749040"/>
+            <a:ext cx="2971800" cy="1645920"/>
+          </a:xfrm>
+          <a:prstGeom prst="rect">
+            <a:avLst/>
+          </a:prstGeom>
+          <a:noFill/>
+          <a:ln/>
+        </p:spPr>
+        <p:txBody>
+          <a:bodyPr wrap="square" lIns="0" tIns="0" rIns="0" bIns="0" rtlCol="0" anchor="t"/>
+          <a:lstStyle/>
+          <a:p>
+            <a:pPr indent="0" marL="0">
+              <a:buNone/>
+            </a:pPr>
+            <a:r>
+              <a:rPr lang="en-US" sz="1350" dirty="0">
+                <a:solidFill>
+                  <a:srgbClr val="5A6B75"/>
+                </a:solidFill>
+                <a:latin typeface="Calibri" pitchFamily="34" charset="0"/>
+                <a:ea typeface="Calibri" pitchFamily="34" charset="-122"/>
+                <a:cs typeface="Calibri" pitchFamily="34" charset="-120"/>
+              </a:rPr>
+              <a:t>Lab 1 environment just worked — no real snags</a:t>
+            </a:r>
+            <a:endParaRPr lang="en-US" sz="1350" dirty="0"/>
+          </a:p>
+        </p:txBody>
+      </p:sp>
+      <p:sp>
+        <p:nvSpPr>
+          <p:cNvPr id="10" name="Shape 8"/>
+          <p:cNvSpPr/>
+          <p:nvPr/>
+        </p:nvSpPr>
+        <p:spPr>
+          <a:xfrm>
+            <a:off x="4297680" y="2286000"/>
+            <a:ext cx="3520440" cy="3291840"/>
+          </a:xfrm>
+          <a:prstGeom prst="roundRect">
+            <a:avLst>
+              <a:gd name="adj" fmla="val 3333"/>
+            </a:avLst>
+          </a:prstGeom>
+          <a:solidFill>
+            <a:srgbClr val="E3E9EC"/>
+          </a:solidFill>
+          <a:ln/>
+        </p:spPr>
+      </p:sp>
+      <p:sp>
+        <p:nvSpPr>
+          <p:cNvPr id="11" name="Shape 9"/>
+          <p:cNvSpPr/>
+          <p:nvPr/>
+        </p:nvSpPr>
+        <p:spPr>
+          <a:xfrm>
+            <a:off x="4572000" y="2560320"/>
+            <a:ext cx="548640" cy="548640"/>
+          </a:xfrm>
+          <a:prstGeom prst="ellipse">
+            <a:avLst/>
+          </a:prstGeom>
+          <a:solidFill>
+            <a:srgbClr val="0B3D59"/>
+          </a:solidFill>
+          <a:ln/>
+        </p:spPr>
+      </p:sp>
+      <p:sp>
+        <p:nvSpPr>
+          <p:cNvPr id="12" name="Text 10"/>
+          <p:cNvSpPr txBox="1"/>
+          <p:nvPr/>
+        </p:nvSpPr>
+        <p:spPr>
+          <a:xfrm>
+            <a:off x="4572000" y="2560320"/>
+            <a:ext cx="548640" cy="548640"/>
+          </a:xfrm>
+          <a:prstGeom prst="rect">
+            <a:avLst/>
+          </a:prstGeom>
+          <a:noFill/>
+          <a:ln/>
+        </p:spPr>
+        <p:txBody>
+          <a:bodyPr wrap="square" lIns="0" tIns="0" rIns="0" bIns="0" rtlCol="0" anchor="ctr"/>
+          <a:lstStyle/>
+          <a:p>
+            <a:pPr algn="ctr" indent="0" marL="0">
+              <a:buNone/>
+            </a:pPr>
+            <a:r>
+              <a:rPr lang="en-US" sz="2000" b="1" dirty="0">
+                <a:solidFill>
+                  <a:srgbClr val="FFFFFF"/>
+                </a:solidFill>
+                <a:latin typeface="Calibri" pitchFamily="34" charset="0"/>
+                <a:ea typeface="Calibri" pitchFamily="34" charset="-122"/>
+                <a:cs typeface="Calibri" pitchFamily="34" charset="-120"/>
+              </a:rPr>
+              <a:t>2</a:t>
+            </a:r>
+            <a:endParaRPr lang="en-US" sz="2000" dirty="0"/>
+          </a:p>
+        </p:txBody>
+      </p:sp>
+      <p:sp>
+        <p:nvSpPr>
+          <p:cNvPr id="13" name="Text 11"/>
+          <p:cNvSpPr txBox="1"/>
+          <p:nvPr/>
+        </p:nvSpPr>
+        <p:spPr>
+          <a:xfrm>
+            <a:off x="4572000" y="3246120"/>
+            <a:ext cx="2971800" cy="457200"/>
+          </a:xfrm>
+          <a:prstGeom prst="rect">
+            <a:avLst/>
+          </a:prstGeom>
+          <a:noFill/>
+          <a:ln/>
+        </p:spPr>
+        <p:txBody>
+          <a:bodyPr wrap="square" lIns="0" tIns="0" rIns="0" bIns="0" rtlCol="0" anchor="ctr"/>
+          <a:lstStyle/>
+          <a:p>
+            <a:pPr indent="0" marL="0">
+              <a:buNone/>
+            </a:pPr>
+            <a:r>
+              <a:rPr lang="en-US" sz="1800" b="1" dirty="0">
+                <a:solidFill>
+                  <a:srgbClr val="0B3D59"/>
+                </a:solidFill>
+                <a:latin typeface="Cambria" pitchFamily="34" charset="0"/>
+                <a:ea typeface="Cambria" pitchFamily="34" charset="-122"/>
+                <a:cs typeface="Cambria" pitchFamily="34" charset="-120"/>
+              </a:rPr>
+              <a:t>Stuck, then rescued</a:t>
+            </a:r>
+            <a:endParaRPr lang="en-US" sz="1800" dirty="0"/>
+          </a:p>
+        </p:txBody>
+      </p:sp>
+      <p:sp>
+        <p:nvSpPr>
+          <p:cNvPr id="14" name="Text 12"/>
+          <p:cNvSpPr txBox="1"/>
+          <p:nvPr/>
+        </p:nvSpPr>
+        <p:spPr>
+          <a:xfrm>
+            <a:off x="4572000" y="3749040"/>
+            <a:ext cx="2971800" cy="1645920"/>
+          </a:xfrm>
+          <a:prstGeom prst="rect">
+            <a:avLst/>
+          </a:prstGeom>
+          <a:noFill/>
+          <a:ln/>
+        </p:spPr>
+        <p:txBody>
+          <a:bodyPr wrap="square" lIns="0" tIns="0" rIns="0" bIns="0" rtlCol="0" anchor="t"/>
+          <a:lstStyle/>
+          <a:p>
+            <a:pPr indent="0" marL="0">
+              <a:buNone/>
+            </a:pPr>
+            <a:r>
+              <a:rPr lang="en-US" sz="1350" dirty="0">
+                <a:solidFill>
+                  <a:srgbClr val="5A6B75"/>
+                </a:solidFill>
+                <a:latin typeface="Calibri" pitchFamily="34" charset="0"/>
+                <a:ea typeface="Calibri" pitchFamily="34" charset="-122"/>
+                <a:cs typeface="Calibri" pitchFamily="34" charset="-120"/>
+              </a:rPr>
+              <a:t>Hit a wall, but got past it — office hours, a classmate, Google, AI, anything</a:t>
+            </a:r>
+            <a:endParaRPr lang="en-US" sz="1350" dirty="0"/>
+          </a:p>
+        </p:txBody>
+      </p:sp>
+      <p:sp>
+        <p:nvSpPr>
+          <p:cNvPr id="15" name="Shape 13"/>
+          <p:cNvSpPr/>
+          <p:nvPr/>
+        </p:nvSpPr>
+        <p:spPr>
+          <a:xfrm>
+            <a:off x="8046720" y="2286000"/>
+            <a:ext cx="3520440" cy="3291840"/>
+          </a:xfrm>
+          <a:prstGeom prst="roundRect">
+            <a:avLst>
+              <a:gd name="adj" fmla="val 3333"/>
+            </a:avLst>
+          </a:prstGeom>
+          <a:solidFill>
+            <a:srgbClr val="1C7293"/>
+          </a:solidFill>
+          <a:ln/>
+        </p:spPr>
+      </p:sp>
+      <p:sp>
+        <p:nvSpPr>
+          <p:cNvPr id="16" name="Shape 14"/>
+          <p:cNvSpPr/>
+          <p:nvPr/>
+        </p:nvSpPr>
+        <p:spPr>
+          <a:xfrm>
+            <a:off x="8321040" y="2560320"/>
+            <a:ext cx="548640" cy="548640"/>
+          </a:xfrm>
+          <a:prstGeom prst="ellipse">
+            <a:avLst/>
+          </a:prstGeom>
+          <a:solidFill>
+            <a:srgbClr val="F2A541"/>
+          </a:solidFill>
+          <a:ln/>
+        </p:spPr>
+      </p:sp>
+      <p:sp>
+        <p:nvSpPr>
+          <p:cNvPr id="17" name="Text 15"/>
+          <p:cNvSpPr txBox="1"/>
+          <p:nvPr/>
+        </p:nvSpPr>
+        <p:spPr>
+          <a:xfrm>
+            <a:off x="8321040" y="2560320"/>
+            <a:ext cx="548640" cy="548640"/>
+          </a:xfrm>
+          <a:prstGeom prst="rect">
+            <a:avLst/>
+          </a:prstGeom>
+          <a:noFill/>
+          <a:ln/>
+        </p:spPr>
+        <p:txBody>
+          <a:bodyPr wrap="square" lIns="0" tIns="0" rIns="0" bIns="0" rtlCol="0" anchor="ctr"/>
+          <a:lstStyle/>
+          <a:p>
+            <a:pPr algn="ctr" indent="0" marL="0">
+              <a:buNone/>
+            </a:pPr>
+            <a:r>
+              <a:rPr lang="en-US" sz="2000" b="1" dirty="0">
+                <a:solidFill>
+                  <a:srgbClr val="FFFFFF"/>
+                </a:solidFill>
+                <a:latin typeface="Calibri" pitchFamily="34" charset="0"/>
+                <a:ea typeface="Calibri" pitchFamily="34" charset="-122"/>
+                <a:cs typeface="Calibri" pitchFamily="34" charset="-120"/>
+              </a:rPr>
+              <a:t>3</a:t>
+            </a:r>
+            <a:endParaRPr lang="en-US" sz="2000" dirty="0"/>
+          </a:p>
+        </p:txBody>
+      </p:sp>
+      <p:sp>
+        <p:nvSpPr>
+          <p:cNvPr id="18" name="Text 16"/>
+          <p:cNvSpPr txBox="1"/>
+          <p:nvPr/>
+        </p:nvSpPr>
+        <p:spPr>
+          <a:xfrm>
+            <a:off x="8321040" y="3246120"/>
+            <a:ext cx="2971800" cy="457200"/>
+          </a:xfrm>
+          <a:prstGeom prst="rect">
+            <a:avLst/>
+          </a:prstGeom>
+          <a:noFill/>
+          <a:ln/>
+        </p:spPr>
+        <p:txBody>
+          <a:bodyPr wrap="square" lIns="0" tIns="0" rIns="0" bIns="0" rtlCol="0" anchor="ctr"/>
+          <a:lstStyle/>
+          <a:p>
+            <a:pPr indent="0" marL="0">
+              <a:buNone/>
+            </a:pPr>
+            <a:r>
+              <a:rPr lang="en-US" sz="1800" b="1" dirty="0">
+                <a:solidFill>
+                  <a:srgbClr val="FFFFFF"/>
+                </a:solidFill>
+                <a:latin typeface="Cambria" pitchFamily="34" charset="0"/>
+                <a:ea typeface="Cambria" pitchFamily="34" charset="-122"/>
+                <a:cs typeface="Cambria" pitchFamily="34" charset="-120"/>
+              </a:rPr>
+              <a:t>AI got me unstuck</a:t>
+            </a:r>
+            <a:endParaRPr lang="en-US" sz="1800" dirty="0"/>
+          </a:p>
+        </p:txBody>
+      </p:sp>
+      <p:sp>
+        <p:nvSpPr>
+          <p:cNvPr id="19" name="Text 17"/>
+          <p:cNvSpPr txBox="1"/>
+          <p:nvPr/>
+        </p:nvSpPr>
+        <p:spPr>
+          <a:xfrm>
+            <a:off x="8321040" y="3749040"/>
+            <a:ext cx="2971800" cy="1645920"/>
+          </a:xfrm>
+          <a:prstGeom prst="rect">
+            <a:avLst/>
+          </a:prstGeom>
+          <a:noFill/>
+          <a:ln/>
+        </p:spPr>
+        <p:txBody>
+          <a:bodyPr wrap="square" lIns="0" tIns="0" rIns="0" bIns="0" rtlCol="0" anchor="t"/>
+          <a:lstStyle/>
+          <a:p>
+            <a:pPr indent="0" marL="0">
+              <a:buNone/>
+            </a:pPr>
+            <a:r>
+              <a:rPr lang="en-US" sz="1350" dirty="0">
+                <a:solidFill>
+                  <a:srgbClr val="CADCFC"/>
+                </a:solidFill>
+                <a:latin typeface="Calibri" pitchFamily="34" charset="0"/>
+                <a:ea typeface="Calibri" pitchFamily="34" charset="-122"/>
+                <a:cs typeface="Calibri" pitchFamily="34" charset="-120"/>
+              </a:rPr>
+              <a:t>Of those rescues — how many happened by asking an AI tool</a:t>
+            </a:r>
+            <a:endParaRPr lang="en-US" sz="1350" dirty="0"/>
+          </a:p>
+        </p:txBody>
+      </p:sp>
+      <p:sp>
+        <p:nvSpPr>
+          <p:cNvPr id="20" name="Text 18"/>
+          <p:cNvSpPr txBox="1"/>
+          <p:nvPr/>
+        </p:nvSpPr>
+        <p:spPr>
+          <a:xfrm>
+            <a:off x="11521440" y="6446520"/>
+            <a:ext cx="457200" cy="274320"/>
+          </a:xfrm>
+          <a:prstGeom prst="rect">
+            <a:avLst/>
+          </a:prstGeom>
+          <a:noFill/>
+          <a:ln/>
+        </p:spPr>
+        <p:txBody>
+          <a:bodyPr wrap="square" lIns="0" tIns="0" rIns="0" bIns="0" rtlCol="0" anchor="ctr"/>
+          <a:lstStyle/>
+          <a:p>
+            <a:pPr algn="r" indent="0" marL="0">
+              <a:buNone/>
+            </a:pPr>
+            <a:r>
+              <a:rPr lang="en-US" sz="1000" dirty="0">
+                <a:solidFill>
+                  <a:srgbClr val="5A6B75"/>
+                </a:solidFill>
+                <a:latin typeface="Calibri" pitchFamily="34" charset="0"/>
+                <a:ea typeface="Calibri" pitchFamily="34" charset="-122"/>
+                <a:cs typeface="Calibri" pitchFamily="34" charset="-120"/>
+              </a:rPr>
+              <a:t>3</a:t>
+            </a:r>
+            <a:endParaRPr lang="en-US" sz="1000" dirty="0"/>
+          </a:p>
+        </p:txBody>
+      </p:sp>
+    </p:spTree>
+  </p:cSld>
+  <p:clrMapOvr>
+    <a:masterClrMapping/>
+  </p:clrMapOvr>
+</p:sld>
+</file>
+
 <file path=ppt/slides/slide2.xml><?xml version="1.0" encoding="utf-8"?>
 <p:sld xmlns:a="http://schemas.openxmlformats.org/drawingml/2006/main" xmlns:r="http://schemas.openxmlformats.org/officeDocument/2006/relationships" xmlns:p="http://schemas.openxmlformats.org/presentationml/2006/main">
   <p:cSld name="Slide 2">
@@ -5504,7 +6258,7 @@
                 <a:ea typeface="Calibri" pitchFamily="34" charset="-122"/>
                 <a:cs typeface="Calibri" pitchFamily="34" charset="-120"/>
               </a:rPr>
-              <a:t>3</a:t>
+              <a:t>4</a:t>
             </a:r>
             <a:endParaRPr lang="en-US" sz="1000" dirty="0"/>
           </a:p>
@@ -6208,7 +6962,7 @@
                 <a:ea typeface="Calibri" pitchFamily="34" charset="-122"/>
                 <a:cs typeface="Calibri" pitchFamily="34" charset="-120"/>
               </a:rPr>
-              <a:t>4</a:t>
+              <a:t>5</a:t>
             </a:r>
             <a:endParaRPr lang="en-US" sz="1000" dirty="0"/>
           </a:p>
@@ -6980,7 +7734,7 @@
                 <a:ea typeface="Calibri" pitchFamily="34" charset="-122"/>
                 <a:cs typeface="Calibri" pitchFamily="34" charset="-120"/>
               </a:rPr>
-              <a:t>5</a:t>
+              <a:t>6</a:t>
             </a:r>
             <a:endParaRPr lang="en-US" sz="1000" dirty="0"/>
           </a:p>
@@ -7996,7 +8750,7 @@
                 <a:ea typeface="Calibri" pitchFamily="34" charset="-122"/>
                 <a:cs typeface="Calibri" pitchFamily="34" charset="-120"/>
               </a:rPr>
-              <a:t>6</a:t>
+              <a:t>7</a:t>
             </a:r>
             <a:endParaRPr lang="en-US" sz="1000" dirty="0"/>
           </a:p>
@@ -8852,7 +9606,7 @@
                 <a:ea typeface="Calibri" pitchFamily="34" charset="-122"/>
                 <a:cs typeface="Calibri" pitchFamily="34" charset="-120"/>
               </a:rPr>
-              <a:t>8</a:t>
+              <a:t>9</a:t>
             </a:r>
             <a:endParaRPr lang="en-US" sz="1000" dirty="0"/>
           </a:p>
@@ -9750,7 +10504,7 @@
                 <a:ea typeface="Calibri" pitchFamily="34" charset="-122"/>
                 <a:cs typeface="Calibri" pitchFamily="34" charset="-120"/>
               </a:rPr>
-              <a:t>9</a:t>
+              <a:t>10</a:t>
             </a:r>
             <a:endParaRPr lang="en-US" sz="1000" dirty="0"/>
           </a:p>
